--- a/docs/DuDoanTieuDuong.pptx
+++ b/docs/DuDoanTieuDuong.pptx
@@ -1768,6 +1768,13 @@
   <p:clrMapOvr>
     <a:masterClrMapping/>
   </p:clrMapOvr>
+  <p:timing>
+    <p:tnLst>
+      <p:par>
+        <p:cTn id="1" dur="indefinite" restart="never" nodeType="tmRoot"/>
+      </p:par>
+    </p:tnLst>
+  </p:timing>
 </p:sld>
 </file>
 
@@ -2522,6 +2529,13 @@
   <p:clrMapOvr>
     <a:masterClrMapping/>
   </p:clrMapOvr>
+  <p:timing>
+    <p:tnLst>
+      <p:par>
+        <p:cTn id="1" dur="indefinite" restart="never" nodeType="tmRoot"/>
+      </p:par>
+    </p:tnLst>
+  </p:timing>
 </p:sld>
 </file>
 
@@ -2999,6 +3013,13 @@
   <p:clrMapOvr>
     <a:masterClrMapping/>
   </p:clrMapOvr>
+  <p:timing>
+    <p:tnLst>
+      <p:par>
+        <p:cTn id="1" dur="indefinite" restart="never" nodeType="tmRoot"/>
+      </p:par>
+    </p:tnLst>
+  </p:timing>
 </p:sld>
 </file>
 
@@ -3552,7 +3573,7 @@
           <p:nvPr>
             <p:extLst>
               <p:ext uri="{D42A27DB-BD31-4B8C-83A1-F6EECF244321}">
-                <p14:modId xmlns:p14="http://schemas.microsoft.com/office/powerpoint/2010/main" val="1579011935"/>
+                <p14:modId xmlns:p14="http://schemas.microsoft.com/office/powerpoint/2010/main" val="903891221"/>
               </p:ext>
             </p:extLst>
           </p:nvPr>
@@ -4504,7 +4525,10 @@
                       <a:tailEnd type="none" w="med" len="med"/>
                     </a:lnB>
                     <a:solidFill>
-                      <a:srgbClr val="FFFFFF"/>
+                      <a:schemeClr val="accent2">
+                        <a:lumMod val="60000"/>
+                        <a:lumOff val="40000"/>
+                      </a:schemeClr>
                     </a:solidFill>
                   </a:tcPr>
                 </a:tc>
@@ -4572,7 +4596,10 @@
                       <a:tailEnd type="none" w="med" len="med"/>
                     </a:lnB>
                     <a:solidFill>
-                      <a:srgbClr val="FFFFFF"/>
+                      <a:schemeClr val="accent2">
+                        <a:lumMod val="60000"/>
+                        <a:lumOff val="40000"/>
+                      </a:schemeClr>
                     </a:solidFill>
                   </a:tcPr>
                 </a:tc>
@@ -4640,7 +4667,10 @@
                       <a:tailEnd type="none" w="med" len="med"/>
                     </a:lnB>
                     <a:solidFill>
-                      <a:srgbClr val="FFFFFF"/>
+                      <a:schemeClr val="accent2">
+                        <a:lumMod val="60000"/>
+                        <a:lumOff val="40000"/>
+                      </a:schemeClr>
                     </a:solidFill>
                   </a:tcPr>
                 </a:tc>
@@ -4708,7 +4738,10 @@
                       <a:tailEnd type="none" w="med" len="med"/>
                     </a:lnB>
                     <a:solidFill>
-                      <a:srgbClr val="FFFFFF"/>
+                      <a:schemeClr val="accent2">
+                        <a:lumMod val="60000"/>
+                        <a:lumOff val="40000"/>
+                      </a:schemeClr>
                     </a:solidFill>
                   </a:tcPr>
                 </a:tc>
@@ -4776,7 +4809,10 @@
                       <a:tailEnd type="none" w="med" len="med"/>
                     </a:lnB>
                     <a:solidFill>
-                      <a:srgbClr val="FFFFFF"/>
+                      <a:schemeClr val="accent2">
+                        <a:lumMod val="60000"/>
+                        <a:lumOff val="40000"/>
+                      </a:schemeClr>
                     </a:solidFill>
                   </a:tcPr>
                 </a:tc>
@@ -4844,7 +4880,10 @@
                       <a:tailEnd type="none" w="med" len="med"/>
                     </a:lnB>
                     <a:solidFill>
-                      <a:srgbClr val="FFFFFF"/>
+                      <a:schemeClr val="accent2">
+                        <a:lumMod val="60000"/>
+                        <a:lumOff val="40000"/>
+                      </a:schemeClr>
                     </a:solidFill>
                   </a:tcPr>
                 </a:tc>
@@ -5333,9 +5372,7 @@
                       <a:headEnd type="none" w="med" len="med"/>
                       <a:tailEnd type="none" w="med" len="med"/>
                     </a:lnB>
-                    <a:solidFill>
-                      <a:srgbClr val="FBE3DA"/>
-                    </a:solidFill>
+                    <a:noFill/>
                   </a:tcPr>
                 </a:tc>
                 <a:tc>
@@ -5401,9 +5438,7 @@
                       <a:headEnd type="none" w="med" len="med"/>
                       <a:tailEnd type="none" w="med" len="med"/>
                     </a:lnB>
-                    <a:solidFill>
-                      <a:srgbClr val="FBE3DA"/>
-                    </a:solidFill>
+                    <a:noFill/>
                   </a:tcPr>
                 </a:tc>
                 <a:tc>
@@ -5469,9 +5504,7 @@
                       <a:headEnd type="none" w="med" len="med"/>
                       <a:tailEnd type="none" w="med" len="med"/>
                     </a:lnB>
-                    <a:solidFill>
-                      <a:srgbClr val="FBE3DA"/>
-                    </a:solidFill>
+                    <a:noFill/>
                   </a:tcPr>
                 </a:tc>
                 <a:tc>
@@ -5537,9 +5570,7 @@
                       <a:headEnd type="none" w="med" len="med"/>
                       <a:tailEnd type="none" w="med" len="med"/>
                     </a:lnB>
-                    <a:solidFill>
-                      <a:srgbClr val="FBE3DA"/>
-                    </a:solidFill>
+                    <a:noFill/>
                   </a:tcPr>
                 </a:tc>
                 <a:tc>
@@ -5605,9 +5636,7 @@
                       <a:headEnd type="none" w="med" len="med"/>
                       <a:tailEnd type="none" w="med" len="med"/>
                     </a:lnB>
-                    <a:solidFill>
-                      <a:srgbClr val="FBE3DA"/>
-                    </a:solidFill>
+                    <a:noFill/>
                   </a:tcPr>
                 </a:tc>
                 <a:tc>
@@ -5673,9 +5702,7 @@
                       <a:headEnd type="none" w="med" len="med"/>
                       <a:tailEnd type="none" w="med" len="med"/>
                     </a:lnB>
-                    <a:solidFill>
-                      <a:srgbClr val="FBE3DA"/>
-                    </a:solidFill>
+                    <a:noFill/>
                   </a:tcPr>
                 </a:tc>
                 <a:extLst>

--- a/docs/DuDoanTieuDuong.pptx
+++ b/docs/DuDoanTieuDuong.pptx
@@ -5795,7 +5795,7 @@
         </p:nvSpPr>
         <p:spPr>
           <a:xfrm>
-            <a:off x="457200" y="320040"/>
+            <a:off x="457200" y="306186"/>
             <a:ext cx="8229600" cy="640080"/>
           </a:xfrm>
           <a:prstGeom prst="rect">
